--- a/output_pptx/Open_The_Eyes_Of_My_Heart.pptx
+++ b/output_pptx/Open_The_Eyes_Of_My_Heart.pptx
@@ -3113,8 +3113,8 @@
         </p:nvSpPr>
         <p:spPr>
           <a:xfrm>
-            <a:off x="594360" y="2258568"/>
-            <a:ext cx="11002975" cy="685800"/>
+            <a:off x="640080" y="2052828"/>
+            <a:ext cx="10911535" cy="731520"/>
           </a:xfrm>
           <a:prstGeom prst="rect">
             <a:avLst/>
@@ -3129,7 +3129,7 @@
           <a:p>
             <a:pPr algn="ctr"/>
             <a:r>
-              <a:rPr sz="2816" b="1" i="0">
+              <a:rPr sz="3000" b="1" i="0">
                 <a:solidFill>
                   <a:srgbClr val="FFFFFF"/>
                 </a:solidFill>
@@ -3148,8 +3148,8 @@
         </p:nvSpPr>
         <p:spPr>
           <a:xfrm>
-            <a:off x="594360" y="2980944"/>
-            <a:ext cx="11002975" cy="347472"/>
+            <a:off x="640080" y="2985516"/>
+            <a:ext cx="10911535" cy="731520"/>
           </a:xfrm>
           <a:prstGeom prst="rect">
             <a:avLst/>
@@ -3164,13 +3164,13 @@
           <a:p>
             <a:pPr algn="ctr"/>
             <a:r>
-              <a:rPr sz="2200" b="0" i="1">
-                <a:solidFill>
-                  <a:srgbClr val="8C8C8C"/>
+              <a:rPr sz="2700" b="1" i="0">
+                <a:solidFill>
+                  <a:srgbClr val="FFFFFF"/>
                 </a:solidFill>
                 <a:latin typeface="Arial"/>
               </a:rPr>
-              <a:t>高く上げられた</a:t>
+              <a:t>Derrame Teu amor e poder, pois Tu és santo, santo, santo</a:t>
             </a:r>
           </a:p>
         </p:txBody>
@@ -3183,8 +3183,8 @@
         </p:nvSpPr>
         <p:spPr>
           <a:xfrm>
-            <a:off x="594360" y="3529584"/>
-            <a:ext cx="11002975" cy="685800"/>
+            <a:off x="640080" y="4128516"/>
+            <a:ext cx="10911535" cy="310896"/>
           </a:xfrm>
           <a:prstGeom prst="rect">
             <a:avLst/>
@@ -3199,13 +3199,13 @@
           <a:p>
             <a:pPr algn="ctr"/>
             <a:r>
-              <a:rPr sz="2514" b="1" i="0">
-                <a:solidFill>
-                  <a:srgbClr val="FFFFFF"/>
+              <a:rPr sz="2000" b="0" i="0">
+                <a:solidFill>
+                  <a:srgbClr val="828282"/>
                 </a:solidFill>
                 <a:latin typeface="Arial"/>
               </a:rPr>
-              <a:t>Derrame Teu amor e poder, pois Tu és santo, santo, santo</a:t>
+              <a:t>高く上げられた</a:t>
             </a:r>
           </a:p>
         </p:txBody>
@@ -3218,8 +3218,8 @@
         </p:nvSpPr>
         <p:spPr>
           <a:xfrm>
-            <a:off x="594360" y="4251960"/>
-            <a:ext cx="11002975" cy="347472"/>
+            <a:off x="640080" y="4494276"/>
+            <a:ext cx="10911535" cy="310896"/>
           </a:xfrm>
           <a:prstGeom prst="rect">
             <a:avLst/>
@@ -3234,9 +3234,9 @@
           <a:p>
             <a:pPr algn="ctr"/>
             <a:r>
-              <a:rPr sz="2200" b="0" i="1">
-                <a:solidFill>
-                  <a:srgbClr val="8C8C8C"/>
+              <a:rPr sz="2000" b="0" i="0">
+                <a:solidFill>
+                  <a:srgbClr val="828282"/>
                 </a:solidFill>
                 <a:latin typeface="Arial"/>
               </a:rPr>
@@ -3279,8 +3279,8 @@
         </p:nvSpPr>
         <p:spPr>
           <a:xfrm>
-            <a:off x="594360" y="2258568"/>
-            <a:ext cx="11002975" cy="685800"/>
+            <a:off x="640080" y="2052828"/>
+            <a:ext cx="10911535" cy="731520"/>
           </a:xfrm>
           <a:prstGeom prst="rect">
             <a:avLst/>
@@ -3295,7 +3295,7 @@
           <a:p>
             <a:pPr algn="ctr"/>
             <a:r>
-              <a:rPr sz="4400" b="1" i="0">
+              <a:rPr sz="4800" b="1" i="0">
                 <a:solidFill>
                   <a:srgbClr val="FFFFFF"/>
                 </a:solidFill>
@@ -3314,8 +3314,8 @@
         </p:nvSpPr>
         <p:spPr>
           <a:xfrm>
-            <a:off x="594360" y="2980944"/>
-            <a:ext cx="11002975" cy="347472"/>
+            <a:off x="640080" y="2985516"/>
+            <a:ext cx="10911535" cy="731520"/>
           </a:xfrm>
           <a:prstGeom prst="rect">
             <a:avLst/>
@@ -3330,13 +3330,13 @@
           <a:p>
             <a:pPr algn="ctr"/>
             <a:r>
-              <a:rPr sz="2200" b="0" i="1">
-                <a:solidFill>
-                  <a:srgbClr val="8C8C8C"/>
+              <a:rPr sz="4800" b="1" i="0">
+                <a:solidFill>
+                  <a:srgbClr val="FFFFFF"/>
                 </a:solidFill>
                 <a:latin typeface="Arial"/>
               </a:rPr>
-              <a:t>主イエスあなたに</a:t>
+              <a:t>Santo, santo, santo</a:t>
             </a:r>
           </a:p>
         </p:txBody>
@@ -3349,8 +3349,8 @@
         </p:nvSpPr>
         <p:spPr>
           <a:xfrm>
-            <a:off x="594360" y="3529584"/>
-            <a:ext cx="11002975" cy="685800"/>
+            <a:off x="640080" y="4128516"/>
+            <a:ext cx="10911535" cy="310896"/>
           </a:xfrm>
           <a:prstGeom prst="rect">
             <a:avLst/>
@@ -3365,13 +3365,13 @@
           <a:p>
             <a:pPr algn="ctr"/>
             <a:r>
-              <a:rPr sz="4400" b="1" i="0">
-                <a:solidFill>
-                  <a:srgbClr val="FFFFFF"/>
+              <a:rPr sz="2000" b="0" i="0">
+                <a:solidFill>
+                  <a:srgbClr val="828282"/>
                 </a:solidFill>
                 <a:latin typeface="Arial"/>
               </a:rPr>
-              <a:t>Santo, santo, santo</a:t>
+              <a:t>主イエスあなたに</a:t>
             </a:r>
           </a:p>
         </p:txBody>
@@ -3384,8 +3384,8 @@
         </p:nvSpPr>
         <p:spPr>
           <a:xfrm>
-            <a:off x="594360" y="4251960"/>
-            <a:ext cx="11002975" cy="347472"/>
+            <a:off x="640080" y="4494276"/>
+            <a:ext cx="10911535" cy="310896"/>
           </a:xfrm>
           <a:prstGeom prst="rect">
             <a:avLst/>
@@ -3400,9 +3400,9 @@
           <a:p>
             <a:pPr algn="ctr"/>
             <a:r>
-              <a:rPr sz="2200" b="0" i="1">
-                <a:solidFill>
-                  <a:srgbClr val="8C8C8C"/>
+              <a:rPr sz="2000" b="0" i="0">
+                <a:solidFill>
+                  <a:srgbClr val="828282"/>
                 </a:solidFill>
                 <a:latin typeface="Arial"/>
               </a:rPr>
@@ -3445,8 +3445,8 @@
         </p:nvSpPr>
         <p:spPr>
           <a:xfrm>
-            <a:off x="594360" y="2258568"/>
-            <a:ext cx="11002975" cy="685800"/>
+            <a:off x="640080" y="2052828"/>
+            <a:ext cx="10911535" cy="731520"/>
           </a:xfrm>
           <a:prstGeom prst="rect">
             <a:avLst/>
@@ -3461,7 +3461,7 @@
           <a:p>
             <a:pPr algn="ctr"/>
             <a:r>
-              <a:rPr sz="4400" b="1" i="0">
+              <a:rPr sz="4800" b="1" i="0">
                 <a:solidFill>
                   <a:srgbClr val="FFFFFF"/>
                 </a:solidFill>
@@ -3480,8 +3480,8 @@
         </p:nvSpPr>
         <p:spPr>
           <a:xfrm>
-            <a:off x="594360" y="2980944"/>
-            <a:ext cx="11002975" cy="347472"/>
+            <a:off x="640080" y="2985516"/>
+            <a:ext cx="10911535" cy="731520"/>
           </a:xfrm>
           <a:prstGeom prst="rect">
             <a:avLst/>
@@ -3496,13 +3496,13 @@
           <a:p>
             <a:pPr algn="ctr"/>
             <a:r>
-              <a:rPr sz="2200" b="0" i="1">
-                <a:solidFill>
-                  <a:srgbClr val="8C8C8C"/>
+              <a:rPr sz="4800" b="1" i="0">
+                <a:solidFill>
+                  <a:srgbClr val="FFFFFF"/>
                 </a:solidFill>
                 <a:latin typeface="Arial"/>
               </a:rPr>
-              <a:t>主イエスあなたに</a:t>
+              <a:t>Santo, santo, santo</a:t>
             </a:r>
           </a:p>
         </p:txBody>
@@ -3515,8 +3515,8 @@
         </p:nvSpPr>
         <p:spPr>
           <a:xfrm>
-            <a:off x="594360" y="3529584"/>
-            <a:ext cx="11002975" cy="685800"/>
+            <a:off x="640080" y="4128516"/>
+            <a:ext cx="10911535" cy="310896"/>
           </a:xfrm>
           <a:prstGeom prst="rect">
             <a:avLst/>
@@ -3531,13 +3531,13 @@
           <a:p>
             <a:pPr algn="ctr"/>
             <a:r>
-              <a:rPr sz="4400" b="1" i="0">
-                <a:solidFill>
-                  <a:srgbClr val="FFFFFF"/>
+              <a:rPr sz="2000" b="0" i="0">
+                <a:solidFill>
+                  <a:srgbClr val="828282"/>
                 </a:solidFill>
                 <a:latin typeface="Arial"/>
               </a:rPr>
-              <a:t>Santo, santo, santo</a:t>
+              <a:t>主イエスあなたに</a:t>
             </a:r>
           </a:p>
         </p:txBody>
@@ -3550,8 +3550,8 @@
         </p:nvSpPr>
         <p:spPr>
           <a:xfrm>
-            <a:off x="594360" y="4251960"/>
-            <a:ext cx="11002975" cy="347472"/>
+            <a:off x="640080" y="4494276"/>
+            <a:ext cx="10911535" cy="310896"/>
           </a:xfrm>
           <a:prstGeom prst="rect">
             <a:avLst/>
@@ -3566,9 +3566,9 @@
           <a:p>
             <a:pPr algn="ctr"/>
             <a:r>
-              <a:rPr sz="2200" b="0" i="1">
-                <a:solidFill>
-                  <a:srgbClr val="8C8C8C"/>
+              <a:rPr sz="2000" b="0" i="0">
+                <a:solidFill>
+                  <a:srgbClr val="828282"/>
                 </a:solidFill>
                 <a:latin typeface="Arial"/>
               </a:rPr>
@@ -3611,8 +3611,8 @@
         </p:nvSpPr>
         <p:spPr>
           <a:xfrm>
-            <a:off x="594360" y="2258568"/>
-            <a:ext cx="11002975" cy="685800"/>
+            <a:off x="640080" y="2052828"/>
+            <a:ext cx="10911535" cy="731520"/>
           </a:xfrm>
           <a:prstGeom prst="rect">
             <a:avLst/>
@@ -3627,7 +3627,7 @@
           <a:p>
             <a:pPr algn="ctr"/>
             <a:r>
-              <a:rPr sz="4400" b="1" i="0">
+              <a:rPr sz="4800" b="1" i="0">
                 <a:solidFill>
                   <a:srgbClr val="FFFFFF"/>
                 </a:solidFill>
@@ -3646,8 +3646,8 @@
         </p:nvSpPr>
         <p:spPr>
           <a:xfrm>
-            <a:off x="594360" y="2980944"/>
-            <a:ext cx="11002975" cy="347472"/>
+            <a:off x="640080" y="2985516"/>
+            <a:ext cx="10911535" cy="731520"/>
           </a:xfrm>
           <a:prstGeom prst="rect">
             <a:avLst/>
@@ -3662,83 +3662,13 @@
           <a:p>
             <a:pPr algn="ctr"/>
             <a:r>
-              <a:rPr sz="2200" b="0" i="1">
-                <a:solidFill>
-                  <a:srgbClr val="8C8C8C"/>
-                </a:solidFill>
-                <a:latin typeface="Arial"/>
-              </a:rPr>
-              <a:t/>
-            </a:r>
-          </a:p>
-        </p:txBody>
-      </p:sp>
-      <p:sp>
-        <p:nvSpPr>
-          <p:cNvPr id="4" name="TextBox 3"/>
-          <p:cNvSpPr txBox="1"/>
-          <p:nvPr/>
-        </p:nvSpPr>
-        <p:spPr>
-          <a:xfrm>
-            <a:off x="594360" y="3529584"/>
-            <a:ext cx="11002975" cy="685800"/>
-          </a:xfrm>
-          <a:prstGeom prst="rect">
-            <a:avLst/>
-          </a:prstGeom>
-          <a:noFill/>
-        </p:spPr>
-        <p:txBody>
-          <a:bodyPr wrap="square">
-            <a:spAutoFit/>
-          </a:bodyPr>
-          <a:lstStyle/>
-          <a:p>
-            <a:pPr algn="ctr"/>
-            <a:r>
-              <a:rPr sz="4400" b="1" i="0">
+              <a:rPr sz="4800" b="1" i="0">
                 <a:solidFill>
                   <a:srgbClr val="FFFFFF"/>
                 </a:solidFill>
                 <a:latin typeface="Arial"/>
               </a:rPr>
               <a:t>Eu quero Te ver</a:t>
-            </a:r>
-          </a:p>
-        </p:txBody>
-      </p:sp>
-      <p:sp>
-        <p:nvSpPr>
-          <p:cNvPr id="5" name="TextBox 4"/>
-          <p:cNvSpPr txBox="1"/>
-          <p:nvPr/>
-        </p:nvSpPr>
-        <p:spPr>
-          <a:xfrm>
-            <a:off x="594360" y="4251960"/>
-            <a:ext cx="11002975" cy="347472"/>
-          </a:xfrm>
-          <a:prstGeom prst="rect">
-            <a:avLst/>
-          </a:prstGeom>
-          <a:noFill/>
-        </p:spPr>
-        <p:txBody>
-          <a:bodyPr wrap="square">
-            <a:spAutoFit/>
-          </a:bodyPr>
-          <a:lstStyle/>
-          <a:p>
-            <a:pPr algn="ctr"/>
-            <a:r>
-              <a:rPr sz="2200" b="0" i="1">
-                <a:solidFill>
-                  <a:srgbClr val="8C8C8C"/>
-                </a:solidFill>
-                <a:latin typeface="Arial"/>
-              </a:rPr>
-              <a:t/>
             </a:r>
           </a:p>
         </p:txBody>
@@ -3777,8 +3707,8 @@
         </p:nvSpPr>
         <p:spPr>
           <a:xfrm>
-            <a:off x="594360" y="2258568"/>
-            <a:ext cx="11002975" cy="685800"/>
+            <a:off x="640080" y="2052828"/>
+            <a:ext cx="10911535" cy="731520"/>
           </a:xfrm>
           <a:prstGeom prst="rect">
             <a:avLst/>
@@ -3793,7 +3723,7 @@
           <a:p>
             <a:pPr algn="ctr"/>
             <a:r>
-              <a:rPr sz="4400" b="1" i="0">
+              <a:rPr sz="4800" b="1" i="0">
                 <a:solidFill>
                   <a:srgbClr val="FFFFFF"/>
                 </a:solidFill>
@@ -3812,8 +3742,8 @@
         </p:nvSpPr>
         <p:spPr>
           <a:xfrm>
-            <a:off x="594360" y="2980944"/>
-            <a:ext cx="11002975" cy="347472"/>
+            <a:off x="640080" y="2985516"/>
+            <a:ext cx="10911535" cy="731520"/>
           </a:xfrm>
           <a:prstGeom prst="rect">
             <a:avLst/>
@@ -3828,83 +3758,13 @@
           <a:p>
             <a:pPr algn="ctr"/>
             <a:r>
-              <a:rPr sz="2200" b="0" i="1">
-                <a:solidFill>
-                  <a:srgbClr val="8C8C8C"/>
-                </a:solidFill>
-                <a:latin typeface="Arial"/>
-              </a:rPr>
-              <a:t/>
-            </a:r>
-          </a:p>
-        </p:txBody>
-      </p:sp>
-      <p:sp>
-        <p:nvSpPr>
-          <p:cNvPr id="4" name="TextBox 3"/>
-          <p:cNvSpPr txBox="1"/>
-          <p:nvPr/>
-        </p:nvSpPr>
-        <p:spPr>
-          <a:xfrm>
-            <a:off x="594360" y="3529584"/>
-            <a:ext cx="11002975" cy="685800"/>
-          </a:xfrm>
-          <a:prstGeom prst="rect">
-            <a:avLst/>
-          </a:prstGeom>
-          <a:noFill/>
-        </p:spPr>
-        <p:txBody>
-          <a:bodyPr wrap="square">
-            <a:spAutoFit/>
-          </a:bodyPr>
-          <a:lstStyle/>
-          <a:p>
-            <a:pPr algn="ctr"/>
-            <a:r>
-              <a:rPr sz="4400" b="1" i="0">
+              <a:rPr sz="4800" b="1" i="0">
                 <a:solidFill>
                   <a:srgbClr val="FFFFFF"/>
                 </a:solidFill>
                 <a:latin typeface="Arial"/>
               </a:rPr>
               <a:t>Eu quero Te ver</a:t>
-            </a:r>
-          </a:p>
-        </p:txBody>
-      </p:sp>
-      <p:sp>
-        <p:nvSpPr>
-          <p:cNvPr id="5" name="TextBox 4"/>
-          <p:cNvSpPr txBox="1"/>
-          <p:nvPr/>
-        </p:nvSpPr>
-        <p:spPr>
-          <a:xfrm>
-            <a:off x="594360" y="4251960"/>
-            <a:ext cx="11002975" cy="347472"/>
-          </a:xfrm>
-          <a:prstGeom prst="rect">
-            <a:avLst/>
-          </a:prstGeom>
-          <a:noFill/>
-        </p:spPr>
-        <p:txBody>
-          <a:bodyPr wrap="square">
-            <a:spAutoFit/>
-          </a:bodyPr>
-          <a:lstStyle/>
-          <a:p>
-            <a:pPr algn="ctr"/>
-            <a:r>
-              <a:rPr sz="2200" b="0" i="1">
-                <a:solidFill>
-                  <a:srgbClr val="8C8C8C"/>
-                </a:solidFill>
-                <a:latin typeface="Arial"/>
-              </a:rPr>
-              <a:t/>
             </a:r>
           </a:p>
         </p:txBody>
@@ -3943,8 +3803,8 @@
         </p:nvSpPr>
         <p:spPr>
           <a:xfrm>
-            <a:off x="594360" y="1837944"/>
-            <a:ext cx="11002975" cy="685800"/>
+            <a:off x="640080" y="1650492"/>
+            <a:ext cx="10911535" cy="731520"/>
           </a:xfrm>
           <a:prstGeom prst="rect">
             <a:avLst/>
@@ -3959,7 +3819,7 @@
           <a:p>
             <a:pPr algn="ctr"/>
             <a:r>
-              <a:rPr sz="4400" b="1" i="0">
+              <a:rPr sz="4800" b="1" i="0">
                 <a:solidFill>
                   <a:srgbClr val="FFFFFF"/>
                 </a:solidFill>
@@ -3978,8 +3838,8 @@
         </p:nvSpPr>
         <p:spPr>
           <a:xfrm>
-            <a:off x="594360" y="2560320"/>
-            <a:ext cx="11002975" cy="384048"/>
+            <a:off x="640080" y="2418588"/>
+            <a:ext cx="10911535" cy="365760"/>
           </a:xfrm>
           <a:prstGeom prst="rect">
             <a:avLst/>
@@ -3996,7 +3856,7 @@
             <a:r>
               <a:rPr sz="2400" b="0" i="1">
                 <a:solidFill>
-                  <a:srgbClr val="B4B4B4"/>
+                  <a:srgbClr val="AAAAAA"/>
                 </a:solidFill>
                 <a:latin typeface="Arial"/>
               </a:rPr>
@@ -4013,8 +3873,8 @@
         </p:nvSpPr>
         <p:spPr>
           <a:xfrm>
-            <a:off x="594360" y="2980944"/>
-            <a:ext cx="11002975" cy="347472"/>
+            <a:off x="640080" y="2985516"/>
+            <a:ext cx="10911535" cy="731520"/>
           </a:xfrm>
           <a:prstGeom prst="rect">
             <a:avLst/>
@@ -4029,13 +3889,13 @@
           <a:p>
             <a:pPr algn="ctr"/>
             <a:r>
-              <a:rPr sz="1920" b="0" i="1">
-                <a:solidFill>
-                  <a:srgbClr val="8C8C8C"/>
+              <a:rPr sz="4800" b="1" i="0">
+                <a:solidFill>
+                  <a:srgbClr val="FFFFFF"/>
                 </a:solidFill>
                 <a:latin typeface="Arial"/>
               </a:rPr>
-              <a:t>Exaltado e bem alto, brilhando a luz da Tua glória</a:t>
+              <a:t>栄光に輝く</a:t>
             </a:r>
           </a:p>
         </p:txBody>
@@ -4048,8 +3908,8 @@
         </p:nvSpPr>
         <p:spPr>
           <a:xfrm>
-            <a:off x="594360" y="3529584"/>
-            <a:ext cx="11002975" cy="685800"/>
+            <a:off x="640080" y="3753612"/>
+            <a:ext cx="10911535" cy="365760"/>
           </a:xfrm>
           <a:prstGeom prst="rect">
             <a:avLst/>
@@ -4064,13 +3924,13 @@
           <a:p>
             <a:pPr algn="ctr"/>
             <a:r>
-              <a:rPr sz="4400" b="1" i="0">
-                <a:solidFill>
-                  <a:srgbClr val="FFFFFF"/>
+              <a:rPr sz="2400" b="0" i="1">
+                <a:solidFill>
+                  <a:srgbClr val="AAAAAA"/>
                 </a:solidFill>
                 <a:latin typeface="Arial"/>
               </a:rPr>
-              <a:t>栄光に輝く</a:t>
+              <a:t>eikou ni kagayaku</a:t>
             </a:r>
           </a:p>
         </p:txBody>
@@ -4083,8 +3943,8 @@
         </p:nvSpPr>
         <p:spPr>
           <a:xfrm>
-            <a:off x="594360" y="4251960"/>
-            <a:ext cx="11002975" cy="384048"/>
+            <a:off x="640080" y="4530852"/>
+            <a:ext cx="10911535" cy="310896"/>
           </a:xfrm>
           <a:prstGeom prst="rect">
             <a:avLst/>
@@ -4099,13 +3959,13 @@
           <a:p>
             <a:pPr algn="ctr"/>
             <a:r>
-              <a:rPr sz="2400" b="0" i="1">
-                <a:solidFill>
-                  <a:srgbClr val="B4B4B4"/>
+              <a:rPr sz="2000" b="0" i="1">
+                <a:solidFill>
+                  <a:srgbClr val="828282"/>
                 </a:solidFill>
                 <a:latin typeface="Arial"/>
               </a:rPr>
-              <a:t>eikou ni kagayaku</a:t>
+              <a:t>Exaltado e bem alto, brilhando a luz da Tua glória</a:t>
             </a:r>
           </a:p>
         </p:txBody>
@@ -4118,8 +3978,8 @@
         </p:nvSpPr>
         <p:spPr>
           <a:xfrm>
-            <a:off x="594360" y="4672584"/>
-            <a:ext cx="11002975" cy="347472"/>
+            <a:off x="640080" y="4896612"/>
+            <a:ext cx="10911535" cy="310896"/>
           </a:xfrm>
           <a:prstGeom prst="rect">
             <a:avLst/>
@@ -4134,9 +3994,9 @@
           <a:p>
             <a:pPr algn="ctr"/>
             <a:r>
-              <a:rPr sz="1714" b="0" i="1">
-                <a:solidFill>
-                  <a:srgbClr val="8C8C8C"/>
+              <a:rPr sz="2000" b="0" i="1">
+                <a:solidFill>
+                  <a:srgbClr val="828282"/>
                 </a:solidFill>
                 <a:latin typeface="Arial"/>
               </a:rPr>
@@ -4179,8 +4039,8 @@
         </p:nvSpPr>
         <p:spPr>
           <a:xfrm>
-            <a:off x="594360" y="1837944"/>
-            <a:ext cx="11002975" cy="685800"/>
+            <a:off x="640080" y="1650492"/>
+            <a:ext cx="10911535" cy="731520"/>
           </a:xfrm>
           <a:prstGeom prst="rect">
             <a:avLst/>
@@ -4195,7 +4055,7 @@
           <a:p>
             <a:pPr algn="ctr"/>
             <a:r>
-              <a:rPr sz="4400" b="1" i="0">
+              <a:rPr sz="4800" b="1" i="0">
                 <a:solidFill>
                   <a:srgbClr val="FFFFFF"/>
                 </a:solidFill>
@@ -4214,8 +4074,8 @@
         </p:nvSpPr>
         <p:spPr>
           <a:xfrm>
-            <a:off x="594360" y="2560320"/>
-            <a:ext cx="11002975" cy="384048"/>
+            <a:off x="640080" y="2418588"/>
+            <a:ext cx="10911535" cy="365760"/>
           </a:xfrm>
           <a:prstGeom prst="rect">
             <a:avLst/>
@@ -4232,7 +4092,7 @@
             <a:r>
               <a:rPr sz="2400" b="0" i="1">
                 <a:solidFill>
-                  <a:srgbClr val="B4B4B4"/>
+                  <a:srgbClr val="AAAAAA"/>
                 </a:solidFill>
                 <a:latin typeface="Arial"/>
               </a:rPr>
@@ -4249,8 +4109,8 @@
         </p:nvSpPr>
         <p:spPr>
           <a:xfrm>
-            <a:off x="594360" y="2980944"/>
-            <a:ext cx="11002975" cy="347472"/>
+            <a:off x="640080" y="2985516"/>
+            <a:ext cx="10911535" cy="731520"/>
           </a:xfrm>
           <a:prstGeom prst="rect">
             <a:avLst/>
@@ -4265,13 +4125,13 @@
           <a:p>
             <a:pPr algn="ctr"/>
             <a:r>
-              <a:rPr sz="2000" b="0" i="1">
-                <a:solidFill>
-                  <a:srgbClr val="8C8C8C"/>
+              <a:rPr sz="4800" b="1" i="0">
+                <a:solidFill>
+                  <a:srgbClr val="FFFFFF"/>
                 </a:solidFill>
                 <a:latin typeface="Arial"/>
               </a:rPr>
-              <a:t>Santo, santo, santo</a:t>
+              <a:t>愛を捧げるため</a:t>
             </a:r>
           </a:p>
         </p:txBody>
@@ -4284,8 +4144,8 @@
         </p:nvSpPr>
         <p:spPr>
           <a:xfrm>
-            <a:off x="594360" y="3529584"/>
-            <a:ext cx="11002975" cy="685800"/>
+            <a:off x="640080" y="3753612"/>
+            <a:ext cx="10911535" cy="365760"/>
           </a:xfrm>
           <a:prstGeom prst="rect">
             <a:avLst/>
@@ -4300,13 +4160,13 @@
           <a:p>
             <a:pPr algn="ctr"/>
             <a:r>
-              <a:rPr sz="4400" b="1" i="0">
-                <a:solidFill>
-                  <a:srgbClr val="FFFFFF"/>
+              <a:rPr sz="2400" b="0" i="1">
+                <a:solidFill>
+                  <a:srgbClr val="AAAAAA"/>
                 </a:solidFill>
                 <a:latin typeface="Arial"/>
               </a:rPr>
-              <a:t>愛を捧げるため</a:t>
+              <a:t>ai wo sasageru tame</a:t>
             </a:r>
           </a:p>
         </p:txBody>
@@ -4319,8 +4179,8 @@
         </p:nvSpPr>
         <p:spPr>
           <a:xfrm>
-            <a:off x="594360" y="4251960"/>
-            <a:ext cx="11002975" cy="384048"/>
+            <a:off x="640080" y="4530852"/>
+            <a:ext cx="10911535" cy="310896"/>
           </a:xfrm>
           <a:prstGeom prst="rect">
             <a:avLst/>
@@ -4335,13 +4195,13 @@
           <a:p>
             <a:pPr algn="ctr"/>
             <a:r>
-              <a:rPr sz="2400" b="0" i="1">
-                <a:solidFill>
-                  <a:srgbClr val="B4B4B4"/>
+              <a:rPr sz="2000" b="0" i="1">
+                <a:solidFill>
+                  <a:srgbClr val="828282"/>
                 </a:solidFill>
                 <a:latin typeface="Arial"/>
               </a:rPr>
-              <a:t>ai wo sasageru tame</a:t>
+              <a:t>Santo, santo, santo</a:t>
             </a:r>
           </a:p>
         </p:txBody>
@@ -4354,8 +4214,8 @@
         </p:nvSpPr>
         <p:spPr>
           <a:xfrm>
-            <a:off x="594360" y="4672584"/>
-            <a:ext cx="11002975" cy="347472"/>
+            <a:off x="640080" y="4896612"/>
+            <a:ext cx="10911535" cy="310896"/>
           </a:xfrm>
           <a:prstGeom prst="rect">
             <a:avLst/>
@@ -4372,7 +4232,7 @@
             <a:r>
               <a:rPr sz="2000" b="0" i="1">
                 <a:solidFill>
-                  <a:srgbClr val="8C8C8C"/>
+                  <a:srgbClr val="828282"/>
                 </a:solidFill>
                 <a:latin typeface="Arial"/>
               </a:rPr>
@@ -4415,8 +4275,8 @@
         </p:nvSpPr>
         <p:spPr>
           <a:xfrm>
-            <a:off x="594360" y="1837944"/>
-            <a:ext cx="11002975" cy="685800"/>
+            <a:off x="640080" y="1650492"/>
+            <a:ext cx="10911535" cy="731520"/>
           </a:xfrm>
           <a:prstGeom prst="rect">
             <a:avLst/>
@@ -4431,7 +4291,7 @@
           <a:p>
             <a:pPr algn="ctr"/>
             <a:r>
-              <a:rPr sz="4400" b="1" i="0">
+              <a:rPr sz="4800" b="1" i="0">
                 <a:solidFill>
                   <a:srgbClr val="FFFFFF"/>
                 </a:solidFill>
@@ -4450,8 +4310,8 @@
         </p:nvSpPr>
         <p:spPr>
           <a:xfrm>
-            <a:off x="594360" y="2560320"/>
-            <a:ext cx="11002975" cy="384048"/>
+            <a:off x="640080" y="2418588"/>
+            <a:ext cx="10911535" cy="365760"/>
           </a:xfrm>
           <a:prstGeom prst="rect">
             <a:avLst/>
@@ -4468,7 +4328,7 @@
             <a:r>
               <a:rPr sz="2400" b="0" i="1">
                 <a:solidFill>
-                  <a:srgbClr val="B4B4B4"/>
+                  <a:srgbClr val="AAAAAA"/>
                 </a:solidFill>
                 <a:latin typeface="Arial"/>
               </a:rPr>
@@ -4485,8 +4345,8 @@
         </p:nvSpPr>
         <p:spPr>
           <a:xfrm>
-            <a:off x="594360" y="2980944"/>
-            <a:ext cx="11002975" cy="347472"/>
+            <a:off x="640080" y="2985516"/>
+            <a:ext cx="10911535" cy="731520"/>
           </a:xfrm>
           <a:prstGeom prst="rect">
             <a:avLst/>
@@ -4501,13 +4361,13 @@
           <a:p>
             <a:pPr algn="ctr"/>
             <a:r>
-              <a:rPr sz="2000" b="0" i="1">
-                <a:solidFill>
-                  <a:srgbClr val="8C8C8C"/>
+              <a:rPr sz="4800" b="1" i="0">
+                <a:solidFill>
+                  <a:srgbClr val="FFFFFF"/>
                 </a:solidFill>
                 <a:latin typeface="Arial"/>
               </a:rPr>
-              <a:t/>
+              <a:t>誉めたたえるときに</a:t>
             </a:r>
           </a:p>
         </p:txBody>
@@ -4520,8 +4380,8 @@
         </p:nvSpPr>
         <p:spPr>
           <a:xfrm>
-            <a:off x="594360" y="3529584"/>
-            <a:ext cx="11002975" cy="685800"/>
+            <a:off x="640080" y="3753612"/>
+            <a:ext cx="10911535" cy="365760"/>
           </a:xfrm>
           <a:prstGeom prst="rect">
             <a:avLst/>
@@ -4536,83 +4396,13 @@
           <a:p>
             <a:pPr algn="ctr"/>
             <a:r>
-              <a:rPr sz="4400" b="1" i="0">
-                <a:solidFill>
-                  <a:srgbClr val="FFFFFF"/>
-                </a:solidFill>
-                <a:latin typeface="Arial"/>
-              </a:rPr>
-              <a:t>誉めたたえるときに</a:t>
-            </a:r>
-          </a:p>
-        </p:txBody>
-      </p:sp>
-      <p:sp>
-        <p:nvSpPr>
-          <p:cNvPr id="6" name="TextBox 5"/>
-          <p:cNvSpPr txBox="1"/>
-          <p:nvPr/>
-        </p:nvSpPr>
-        <p:spPr>
-          <a:xfrm>
-            <a:off x="594360" y="4251960"/>
-            <a:ext cx="11002975" cy="384048"/>
-          </a:xfrm>
-          <a:prstGeom prst="rect">
-            <a:avLst/>
-          </a:prstGeom>
-          <a:noFill/>
-        </p:spPr>
-        <p:txBody>
-          <a:bodyPr wrap="square">
-            <a:spAutoFit/>
-          </a:bodyPr>
-          <a:lstStyle/>
-          <a:p>
-            <a:pPr algn="ctr"/>
-            <a:r>
               <a:rPr sz="2400" b="0" i="1">
                 <a:solidFill>
-                  <a:srgbClr val="B4B4B4"/>
+                  <a:srgbClr val="AAAAAA"/>
                 </a:solidFill>
                 <a:latin typeface="Arial"/>
               </a:rPr>
               <a:t>hometataeru to ki ni</a:t>
-            </a:r>
-          </a:p>
-        </p:txBody>
-      </p:sp>
-      <p:sp>
-        <p:nvSpPr>
-          <p:cNvPr id="7" name="TextBox 6"/>
-          <p:cNvSpPr txBox="1"/>
-          <p:nvPr/>
-        </p:nvSpPr>
-        <p:spPr>
-          <a:xfrm>
-            <a:off x="594360" y="4672584"/>
-            <a:ext cx="11002975" cy="347472"/>
-          </a:xfrm>
-          <a:prstGeom prst="rect">
-            <a:avLst/>
-          </a:prstGeom>
-          <a:noFill/>
-        </p:spPr>
-        <p:txBody>
-          <a:bodyPr wrap="square">
-            <a:spAutoFit/>
-          </a:bodyPr>
-          <a:lstStyle/>
-          <a:p>
-            <a:pPr algn="ctr"/>
-            <a:r>
-              <a:rPr sz="2000" b="0" i="1">
-                <a:solidFill>
-                  <a:srgbClr val="8C8C8C"/>
-                </a:solidFill>
-                <a:latin typeface="Arial"/>
-              </a:rPr>
-              <a:t/>
             </a:r>
           </a:p>
         </p:txBody>
@@ -4651,8 +4441,8 @@
         </p:nvSpPr>
         <p:spPr>
           <a:xfrm>
-            <a:off x="594360" y="2683764"/>
-            <a:ext cx="11002975" cy="685800"/>
+            <a:off x="640080" y="2500884"/>
+            <a:ext cx="10911535" cy="731520"/>
           </a:xfrm>
           <a:prstGeom prst="rect">
             <a:avLst/>
@@ -4667,7 +4457,7 @@
           <a:p>
             <a:pPr algn="ctr"/>
             <a:r>
-              <a:rPr sz="4400" b="1" i="0">
+              <a:rPr sz="4800" b="1" i="0">
                 <a:solidFill>
                   <a:srgbClr val="FFFFFF"/>
                 </a:solidFill>
@@ -4686,8 +4476,8 @@
         </p:nvSpPr>
         <p:spPr>
           <a:xfrm>
-            <a:off x="594360" y="3406140"/>
-            <a:ext cx="11002975" cy="384048"/>
+            <a:off x="640080" y="3268980"/>
+            <a:ext cx="10911535" cy="365760"/>
           </a:xfrm>
           <a:prstGeom prst="rect">
             <a:avLst/>
@@ -4704,46 +4494,11 @@
             <a:r>
               <a:rPr sz="2400" b="0" i="1">
                 <a:solidFill>
-                  <a:srgbClr val="B4B4B4"/>
+                  <a:srgbClr val="AAAAAA"/>
                 </a:solidFill>
                 <a:latin typeface="Arial"/>
               </a:rPr>
               <a:t>aito chikara sosoide kudasai shuYo</a:t>
-            </a:r>
-          </a:p>
-        </p:txBody>
-      </p:sp>
-      <p:sp>
-        <p:nvSpPr>
-          <p:cNvPr id="4" name="TextBox 3"/>
-          <p:cNvSpPr txBox="1"/>
-          <p:nvPr/>
-        </p:nvSpPr>
-        <p:spPr>
-          <a:xfrm>
-            <a:off x="594360" y="3826764"/>
-            <a:ext cx="11002975" cy="347472"/>
-          </a:xfrm>
-          <a:prstGeom prst="rect">
-            <a:avLst/>
-          </a:prstGeom>
-          <a:noFill/>
-        </p:spPr>
-        <p:txBody>
-          <a:bodyPr wrap="square">
-            <a:spAutoFit/>
-          </a:bodyPr>
-          <a:lstStyle/>
-          <a:p>
-            <a:pPr algn="ctr"/>
-            <a:r>
-              <a:rPr sz="2000" b="0" i="1">
-                <a:solidFill>
-                  <a:srgbClr val="8C8C8C"/>
-                </a:solidFill>
-                <a:latin typeface="Arial"/>
-              </a:rPr>
-              <a:t/>
             </a:r>
           </a:p>
         </p:txBody>
@@ -4782,8 +4537,8 @@
         </p:nvSpPr>
         <p:spPr>
           <a:xfrm>
-            <a:off x="594360" y="2258568"/>
-            <a:ext cx="11002975" cy="685800"/>
+            <a:off x="640080" y="2052828"/>
+            <a:ext cx="10911535" cy="731520"/>
           </a:xfrm>
           <a:prstGeom prst="rect">
             <a:avLst/>
@@ -4798,7 +4553,7 @@
           <a:p>
             <a:pPr algn="ctr"/>
             <a:r>
-              <a:rPr sz="2816" b="1" i="0">
+              <a:rPr sz="3000" b="1" i="0">
                 <a:solidFill>
                   <a:srgbClr val="FFFFFF"/>
                 </a:solidFill>
@@ -4817,8 +4572,8 @@
         </p:nvSpPr>
         <p:spPr>
           <a:xfrm>
-            <a:off x="594360" y="2980944"/>
-            <a:ext cx="11002975" cy="347472"/>
+            <a:off x="640080" y="2985516"/>
+            <a:ext cx="10911535" cy="731520"/>
           </a:xfrm>
           <a:prstGeom prst="rect">
             <a:avLst/>
@@ -4833,13 +4588,13 @@
           <a:p>
             <a:pPr algn="ctr"/>
             <a:r>
-              <a:rPr sz="2200" b="0" i="1">
-                <a:solidFill>
-                  <a:srgbClr val="8C8C8C"/>
+              <a:rPr sz="2700" b="1" i="0">
+                <a:solidFill>
+                  <a:srgbClr val="FFFFFF"/>
                 </a:solidFill>
                 <a:latin typeface="Arial"/>
               </a:rPr>
-              <a:t>高く上げられた</a:t>
+              <a:t>Derrame Teu amor e poder, pois Tu és santo, santo, santo</a:t>
             </a:r>
           </a:p>
         </p:txBody>
@@ -4852,8 +4607,8 @@
         </p:nvSpPr>
         <p:spPr>
           <a:xfrm>
-            <a:off x="594360" y="3529584"/>
-            <a:ext cx="11002975" cy="685800"/>
+            <a:off x="640080" y="4128516"/>
+            <a:ext cx="10911535" cy="310896"/>
           </a:xfrm>
           <a:prstGeom prst="rect">
             <a:avLst/>
@@ -4868,13 +4623,13 @@
           <a:p>
             <a:pPr algn="ctr"/>
             <a:r>
-              <a:rPr sz="2514" b="1" i="0">
-                <a:solidFill>
-                  <a:srgbClr val="FFFFFF"/>
+              <a:rPr sz="2000" b="0" i="0">
+                <a:solidFill>
+                  <a:srgbClr val="828282"/>
                 </a:solidFill>
                 <a:latin typeface="Arial"/>
               </a:rPr>
-              <a:t>Derrame Teu amor e poder, pois Tu és santo, santo, santo</a:t>
+              <a:t>高く上げられた</a:t>
             </a:r>
           </a:p>
         </p:txBody>
@@ -4887,8 +4642,8 @@
         </p:nvSpPr>
         <p:spPr>
           <a:xfrm>
-            <a:off x="594360" y="4251960"/>
-            <a:ext cx="11002975" cy="347472"/>
+            <a:off x="640080" y="4494276"/>
+            <a:ext cx="10911535" cy="310896"/>
           </a:xfrm>
           <a:prstGeom prst="rect">
             <a:avLst/>
@@ -4903,9 +4658,9 @@
           <a:p>
             <a:pPr algn="ctr"/>
             <a:r>
-              <a:rPr sz="2200" b="0" i="1">
-                <a:solidFill>
-                  <a:srgbClr val="8C8C8C"/>
+              <a:rPr sz="2000" b="0" i="0">
+                <a:solidFill>
+                  <a:srgbClr val="828282"/>
                 </a:solidFill>
                 <a:latin typeface="Arial"/>
               </a:rPr>

--- a/output_pptx/Open_The_Eyes_Of_My_Heart.pptx
+++ b/output_pptx/Open_The_Eyes_Of_My_Heart.pptx
@@ -3673,6 +3673,76 @@
           </a:p>
         </p:txBody>
       </p:sp>
+      <p:sp>
+        <p:nvSpPr>
+          <p:cNvPr id="4" name="TextBox 3"/>
+          <p:cNvSpPr txBox="1"/>
+          <p:nvPr/>
+        </p:nvSpPr>
+        <p:spPr>
+          <a:xfrm>
+            <a:off x="640080" y="4128516"/>
+            <a:ext cx="10911535" cy="310896"/>
+          </a:xfrm>
+          <a:prstGeom prst="rect">
+            <a:avLst/>
+          </a:prstGeom>
+          <a:noFill/>
+        </p:spPr>
+        <p:txBody>
+          <a:bodyPr wrap="square">
+            <a:spAutoFit/>
+          </a:bodyPr>
+          <a:lstStyle/>
+          <a:p>
+            <a:pPr algn="ctr"/>
+            <a:r>
+              <a:rPr sz="2000" b="0" i="0">
+                <a:solidFill>
+                  <a:srgbClr val="828282"/>
+                </a:solidFill>
+                <a:latin typeface="Arial"/>
+              </a:rPr>
+              <a:t>聖い、聖い、聖い</a:t>
+            </a:r>
+          </a:p>
+        </p:txBody>
+      </p:sp>
+      <p:sp>
+        <p:nvSpPr>
+          <p:cNvPr id="5" name="TextBox 4"/>
+          <p:cNvSpPr txBox="1"/>
+          <p:nvPr/>
+        </p:nvSpPr>
+        <p:spPr>
+          <a:xfrm>
+            <a:off x="640080" y="4494276"/>
+            <a:ext cx="10911535" cy="310896"/>
+          </a:xfrm>
+          <a:prstGeom prst="rect">
+            <a:avLst/>
+          </a:prstGeom>
+          <a:noFill/>
+        </p:spPr>
+        <p:txBody>
+          <a:bodyPr wrap="square">
+            <a:spAutoFit/>
+          </a:bodyPr>
+          <a:lstStyle/>
+          <a:p>
+            <a:pPr algn="ctr"/>
+            <a:r>
+              <a:rPr sz="2000" b="0" i="0">
+                <a:solidFill>
+                  <a:srgbClr val="828282"/>
+                </a:solidFill>
+                <a:latin typeface="Arial"/>
+              </a:rPr>
+              <a:t>あなたを見たいです</a:t>
+            </a:r>
+          </a:p>
+        </p:txBody>
+      </p:sp>
     </p:spTree>
   </p:cSld>
   <p:clrMapOvr>
@@ -3769,6 +3839,76 @@
           </a:p>
         </p:txBody>
       </p:sp>
+      <p:sp>
+        <p:nvSpPr>
+          <p:cNvPr id="4" name="TextBox 3"/>
+          <p:cNvSpPr txBox="1"/>
+          <p:nvPr/>
+        </p:nvSpPr>
+        <p:spPr>
+          <a:xfrm>
+            <a:off x="640080" y="4128516"/>
+            <a:ext cx="10911535" cy="310896"/>
+          </a:xfrm>
+          <a:prstGeom prst="rect">
+            <a:avLst/>
+          </a:prstGeom>
+          <a:noFill/>
+        </p:spPr>
+        <p:txBody>
+          <a:bodyPr wrap="square">
+            <a:spAutoFit/>
+          </a:bodyPr>
+          <a:lstStyle/>
+          <a:p>
+            <a:pPr algn="ctr"/>
+            <a:r>
+              <a:rPr sz="2000" b="0" i="0">
+                <a:solidFill>
+                  <a:srgbClr val="828282"/>
+                </a:solidFill>
+                <a:latin typeface="Arial"/>
+              </a:rPr>
+              <a:t>聖い、聖い、聖い</a:t>
+            </a:r>
+          </a:p>
+        </p:txBody>
+      </p:sp>
+      <p:sp>
+        <p:nvSpPr>
+          <p:cNvPr id="5" name="TextBox 4"/>
+          <p:cNvSpPr txBox="1"/>
+          <p:nvPr/>
+        </p:nvSpPr>
+        <p:spPr>
+          <a:xfrm>
+            <a:off x="640080" y="4494276"/>
+            <a:ext cx="10911535" cy="310896"/>
+          </a:xfrm>
+          <a:prstGeom prst="rect">
+            <a:avLst/>
+          </a:prstGeom>
+          <a:noFill/>
+        </p:spPr>
+        <p:txBody>
+          <a:bodyPr wrap="square">
+            <a:spAutoFit/>
+          </a:bodyPr>
+          <a:lstStyle/>
+          <a:p>
+            <a:pPr algn="ctr"/>
+            <a:r>
+              <a:rPr sz="2000" b="0" i="0">
+                <a:solidFill>
+                  <a:srgbClr val="828282"/>
+                </a:solidFill>
+                <a:latin typeface="Arial"/>
+              </a:rPr>
+              <a:t>あなたを見たいです</a:t>
+            </a:r>
+          </a:p>
+        </p:txBody>
+      </p:sp>
     </p:spTree>
   </p:cSld>
   <p:clrMapOvr>
@@ -4407,6 +4547,76 @@
           </a:p>
         </p:txBody>
       </p:sp>
+      <p:sp>
+        <p:nvSpPr>
+          <p:cNvPr id="6" name="TextBox 5"/>
+          <p:cNvSpPr txBox="1"/>
+          <p:nvPr/>
+        </p:nvSpPr>
+        <p:spPr>
+          <a:xfrm>
+            <a:off x="640080" y="4530852"/>
+            <a:ext cx="10911535" cy="310896"/>
+          </a:xfrm>
+          <a:prstGeom prst="rect">
+            <a:avLst/>
+          </a:prstGeom>
+          <a:noFill/>
+        </p:spPr>
+        <p:txBody>
+          <a:bodyPr wrap="square">
+            <a:spAutoFit/>
+          </a:bodyPr>
+          <a:lstStyle/>
+          <a:p>
+            <a:pPr algn="ctr"/>
+            <a:r>
+              <a:rPr sz="2000" b="0" i="1">
+                <a:solidFill>
+                  <a:srgbClr val="828282"/>
+                </a:solidFill>
+                <a:latin typeface="Arial"/>
+              </a:rPr>
+              <a:t>Vosso nome puro</a:t>
+            </a:r>
+          </a:p>
+        </p:txBody>
+      </p:sp>
+      <p:sp>
+        <p:nvSpPr>
+          <p:cNvPr id="7" name="TextBox 6"/>
+          <p:cNvSpPr txBox="1"/>
+          <p:nvPr/>
+        </p:nvSpPr>
+        <p:spPr>
+          <a:xfrm>
+            <a:off x="640080" y="4896612"/>
+            <a:ext cx="10911535" cy="310896"/>
+          </a:xfrm>
+          <a:prstGeom prst="rect">
+            <a:avLst/>
+          </a:prstGeom>
+          <a:noFill/>
+        </p:spPr>
+        <p:txBody>
+          <a:bodyPr wrap="square">
+            <a:spAutoFit/>
+          </a:bodyPr>
+          <a:lstStyle/>
+          <a:p>
+            <a:pPr algn="ctr"/>
+            <a:r>
+              <a:rPr sz="2000" b="0" i="1">
+                <a:solidFill>
+                  <a:srgbClr val="828282"/>
+                </a:solidFill>
+                <a:latin typeface="Arial"/>
+              </a:rPr>
+              <a:t>Quando o louvo e exalto</a:t>
+            </a:r>
+          </a:p>
+        </p:txBody>
+      </p:sp>
     </p:spTree>
   </p:cSld>
   <p:clrMapOvr>
@@ -4499,6 +4709,41 @@
                 <a:latin typeface="Arial"/>
               </a:rPr>
               <a:t>aito chikara sosoide kudasai shuYo</a:t>
+            </a:r>
+          </a:p>
+        </p:txBody>
+      </p:sp>
+      <p:sp>
+        <p:nvSpPr>
+          <p:cNvPr id="4" name="TextBox 3"/>
+          <p:cNvSpPr txBox="1"/>
+          <p:nvPr/>
+        </p:nvSpPr>
+        <p:spPr>
+          <a:xfrm>
+            <a:off x="640080" y="4046220"/>
+            <a:ext cx="10911535" cy="310896"/>
+          </a:xfrm>
+          <a:prstGeom prst="rect">
+            <a:avLst/>
+          </a:prstGeom>
+          <a:noFill/>
+        </p:spPr>
+        <p:txBody>
+          <a:bodyPr wrap="square">
+            <a:spAutoFit/>
+          </a:bodyPr>
+          <a:lstStyle/>
+          <a:p>
+            <a:pPr algn="ctr"/>
+            <a:r>
+              <a:rPr sz="2000" b="0" i="1">
+                <a:solidFill>
+                  <a:srgbClr val="828282"/>
+                </a:solidFill>
+                <a:latin typeface="Arial"/>
+              </a:rPr>
+              <a:t>Derrama amor e força, Senhor</a:t>
             </a:r>
           </a:p>
         </p:txBody>
